--- a/2025-03-31/Smlight Stick.pptx
+++ b/2025-03-31/Smlight Stick.pptx
@@ -5,10 +5,10 @@
     <p:sldMasterId id="2147483686" r:id="rId1"/>
   </p:sldMasterIdLst>
   <p:notesMasterIdLst>
-    <p:notesMasterId r:id="rId21"/>
+    <p:notesMasterId r:id="rId23"/>
   </p:notesMasterIdLst>
   <p:handoutMasterIdLst>
-    <p:handoutMasterId r:id="rId22"/>
+    <p:handoutMasterId r:id="rId24"/>
   </p:handoutMasterIdLst>
   <p:sldIdLst>
     <p:sldId id="1315" r:id="rId2"/>
@@ -28,8 +28,10 @@
     <p:sldId id="1333" r:id="rId16"/>
     <p:sldId id="1334" r:id="rId17"/>
     <p:sldId id="1332" r:id="rId18"/>
-    <p:sldId id="1330" r:id="rId19"/>
-    <p:sldId id="1327" r:id="rId20"/>
+    <p:sldId id="1335" r:id="rId19"/>
+    <p:sldId id="1336" r:id="rId20"/>
+    <p:sldId id="1330" r:id="rId21"/>
+    <p:sldId id="1327" r:id="rId22"/>
   </p:sldIdLst>
   <p:sldSz cx="9144000" cy="6858000" type="screen4x3"/>
   <p:notesSz cx="6797675" cy="9926638"/>
@@ -298,7 +300,7 @@
               <a:pPr>
                 <a:defRPr/>
               </a:pPr>
-              <a:t>03.02.2025</a:t>
+              <a:t>06.05.2025</a:t>
             </a:fld>
             <a:endParaRPr lang="de-AT"/>
           </a:p>
@@ -513,7 +515,7 @@
               <a:pPr>
                 <a:defRPr/>
               </a:pPr>
-              <a:t>03.02.2025</a:t>
+              <a:t>06.05.2025</a:t>
             </a:fld>
             <a:endParaRPr lang="de-AT"/>
           </a:p>
@@ -3283,7 +3285,7 @@
           <p:cNvPr id="2" name="Titel 1">
             <a:extLst>
               <a:ext uri="{FF2B5EF4-FFF2-40B4-BE49-F238E27FC236}">
-                <a16:creationId xmlns:a16="http://schemas.microsoft.com/office/drawing/2014/main" id="{74CB5531-5FE2-43AA-CC1C-89C34CD6F651}"/>
+                <a16:creationId xmlns:a16="http://schemas.microsoft.com/office/drawing/2014/main" id="{0CC2ADEF-6B7E-CFBE-9A69-DA755CD0FB8C}"/>
               </a:ext>
             </a:extLst>
           </p:cNvPr>
@@ -3299,7 +3301,15 @@
           <a:bodyPr/>
           <a:lstStyle/>
           <a:p>
-            <a:endParaRPr lang="de-AT"/>
+            <a:r>
+              <a:rPr lang="de-AT" dirty="0"/>
+              <a:t>Im Problemfall – Stick neu </a:t>
+            </a:r>
+            <a:r>
+              <a:rPr lang="de-AT" dirty="0" err="1"/>
+              <a:t>flashen</a:t>
+            </a:r>
+            <a:endParaRPr lang="de-AT" dirty="0"/>
           </a:p>
         </p:txBody>
       </p:sp>
@@ -3308,7 +3318,7 @@
           <p:cNvPr id="3" name="Textplatzhalter 2">
             <a:extLst>
               <a:ext uri="{FF2B5EF4-FFF2-40B4-BE49-F238E27FC236}">
-                <a16:creationId xmlns:a16="http://schemas.microsoft.com/office/drawing/2014/main" id="{691BD38C-DF82-CCAF-EFCE-77C252A5E387}"/>
+                <a16:creationId xmlns:a16="http://schemas.microsoft.com/office/drawing/2014/main" id="{AB889C85-93D3-1550-A150-856E15048BB5}"/>
               </a:ext>
             </a:extLst>
           </p:cNvPr>
@@ -3319,19 +3329,74 @@
             <p:ph type="body" sz="quarter" idx="10"/>
           </p:nvPr>
         </p:nvSpPr>
-        <p:spPr/>
+        <p:spPr>
+          <a:xfrm>
+            <a:off x="468313" y="980728"/>
+            <a:ext cx="8207375" cy="4608165"/>
+          </a:xfrm>
+        </p:spPr>
         <p:txBody>
           <a:bodyPr/>
           <a:lstStyle/>
           <a:p>
-            <a:endParaRPr lang="de-AT"/>
-          </a:p>
-        </p:txBody>
-      </p:sp>
+            <a:r>
+              <a:rPr lang="de-AT" sz="2000" dirty="0">
+                <a:hlinkClick r:id="rId2"/>
+              </a:rPr>
+              <a:t>SMLIGHT FIRMWARE UPDATER</a:t>
+            </a:r>
+            <a:endParaRPr lang="de-AT" sz="2000" dirty="0"/>
+          </a:p>
+          <a:p>
+            <a:r>
+              <a:rPr lang="de-AT" sz="2000" dirty="0"/>
+              <a:t>USB-Versorgung über PC, </a:t>
+            </a:r>
+            <a:r>
+              <a:rPr lang="de-AT" sz="2000" dirty="0" err="1"/>
+              <a:t>Reset</a:t>
+            </a:r>
+            <a:r>
+              <a:rPr lang="de-AT" sz="2000" dirty="0"/>
+              <a:t> sehr lange drücken</a:t>
+            </a:r>
+          </a:p>
+        </p:txBody>
+      </p:sp>
+      <p:pic>
+        <p:nvPicPr>
+          <p:cNvPr id="5" name="Grafik 4">
+            <a:extLst>
+              <a:ext uri="{FF2B5EF4-FFF2-40B4-BE49-F238E27FC236}">
+                <a16:creationId xmlns:a16="http://schemas.microsoft.com/office/drawing/2014/main" id="{D5478A2B-26F1-D596-B2A9-A97CA9C287F4}"/>
+              </a:ext>
+            </a:extLst>
+          </p:cNvPr>
+          <p:cNvPicPr>
+            <a:picLocks noChangeAspect="1"/>
+          </p:cNvPicPr>
+          <p:nvPr/>
+        </p:nvPicPr>
+        <p:blipFill>
+          <a:blip r:embed="rId3"/>
+          <a:stretch>
+            <a:fillRect/>
+          </a:stretch>
+        </p:blipFill>
+        <p:spPr>
+          <a:xfrm>
+            <a:off x="1759876" y="1916831"/>
+            <a:ext cx="5764452" cy="4254503"/>
+          </a:xfrm>
+          <a:prstGeom prst="rect">
+            <a:avLst/>
+          </a:prstGeom>
+        </p:spPr>
+      </p:pic>
     </p:spTree>
     <p:extLst>
       <p:ext uri="{BB962C8B-B14F-4D97-AF65-F5344CB8AC3E}">
-        <p14:creationId xmlns:p14="http://schemas.microsoft.com/office/powerpoint/2010/main" val="4245075587"/>
+        <p14:creationId xmlns:p14="http://schemas.microsoft.com/office/powerpoint/2010/main" val="168203687"/>
       </p:ext>
     </p:extLst>
   </p:cSld>
@@ -3363,7 +3428,7 @@
           <p:cNvPr id="2" name="Titel 1">
             <a:extLst>
               <a:ext uri="{FF2B5EF4-FFF2-40B4-BE49-F238E27FC236}">
-                <a16:creationId xmlns:a16="http://schemas.microsoft.com/office/drawing/2014/main" id="{C75F0E0C-60A1-8C90-134F-C54878BA41AF}"/>
+                <a16:creationId xmlns:a16="http://schemas.microsoft.com/office/drawing/2014/main" id="{709845A1-F786-1B36-4415-B587EAB916BA}"/>
               </a:ext>
             </a:extLst>
           </p:cNvPr>
@@ -3388,7 +3453,7 @@
           <p:cNvPr id="3" name="Textplatzhalter 2">
             <a:extLst>
               <a:ext uri="{FF2B5EF4-FFF2-40B4-BE49-F238E27FC236}">
-                <a16:creationId xmlns:a16="http://schemas.microsoft.com/office/drawing/2014/main" id="{D8FE1633-E201-DEEC-9EDE-9349B17A9235}"/>
+                <a16:creationId xmlns:a16="http://schemas.microsoft.com/office/drawing/2014/main" id="{C476885D-33C7-DB1B-B567-0D9B67FFC119}"/>
               </a:ext>
             </a:extLst>
           </p:cNvPr>
@@ -3411,7 +3476,7 @@
     </p:spTree>
     <p:extLst>
       <p:ext uri="{BB962C8B-B14F-4D97-AF65-F5344CB8AC3E}">
-        <p14:creationId xmlns:p14="http://schemas.microsoft.com/office/powerpoint/2010/main" val="3363162016"/>
+        <p14:creationId xmlns:p14="http://schemas.microsoft.com/office/powerpoint/2010/main" val="1561272360"/>
       </p:ext>
     </p:extLst>
   </p:cSld>
@@ -3542,6 +3607,166 @@
     <p:extLst>
       <p:ext uri="{BB962C8B-B14F-4D97-AF65-F5344CB8AC3E}">
         <p14:creationId xmlns:p14="http://schemas.microsoft.com/office/powerpoint/2010/main" val="3319786274"/>
+      </p:ext>
+    </p:extLst>
+  </p:cSld>
+  <p:clrMapOvr>
+    <a:masterClrMapping/>
+  </p:clrMapOvr>
+</p:sld>
+</file>
+
+<file path=ppt/slides/slide20.xml><?xml version="1.0" encoding="utf-8"?>
+<p:sld xmlns:a="http://schemas.openxmlformats.org/drawingml/2006/main" xmlns:r="http://schemas.openxmlformats.org/officeDocument/2006/relationships" xmlns:p="http://schemas.openxmlformats.org/presentationml/2006/main">
+  <p:cSld>
+    <p:spTree>
+      <p:nvGrpSpPr>
+        <p:cNvPr id="1" name=""/>
+        <p:cNvGrpSpPr/>
+        <p:nvPr/>
+      </p:nvGrpSpPr>
+      <p:grpSpPr>
+        <a:xfrm>
+          <a:off x="0" y="0"/>
+          <a:ext cx="0" cy="0"/>
+          <a:chOff x="0" y="0"/>
+          <a:chExt cx="0" cy="0"/>
+        </a:xfrm>
+      </p:grpSpPr>
+      <p:sp>
+        <p:nvSpPr>
+          <p:cNvPr id="2" name="Titel 1">
+            <a:extLst>
+              <a:ext uri="{FF2B5EF4-FFF2-40B4-BE49-F238E27FC236}">
+                <a16:creationId xmlns:a16="http://schemas.microsoft.com/office/drawing/2014/main" id="{74CB5531-5FE2-43AA-CC1C-89C34CD6F651}"/>
+              </a:ext>
+            </a:extLst>
+          </p:cNvPr>
+          <p:cNvSpPr>
+            <a:spLocks noGrp="1"/>
+          </p:cNvSpPr>
+          <p:nvPr>
+            <p:ph type="title"/>
+          </p:nvPr>
+        </p:nvSpPr>
+        <p:spPr/>
+        <p:txBody>
+          <a:bodyPr/>
+          <a:lstStyle/>
+          <a:p>
+            <a:endParaRPr lang="de-AT"/>
+          </a:p>
+        </p:txBody>
+      </p:sp>
+      <p:sp>
+        <p:nvSpPr>
+          <p:cNvPr id="3" name="Textplatzhalter 2">
+            <a:extLst>
+              <a:ext uri="{FF2B5EF4-FFF2-40B4-BE49-F238E27FC236}">
+                <a16:creationId xmlns:a16="http://schemas.microsoft.com/office/drawing/2014/main" id="{691BD38C-DF82-CCAF-EFCE-77C252A5E387}"/>
+              </a:ext>
+            </a:extLst>
+          </p:cNvPr>
+          <p:cNvSpPr>
+            <a:spLocks noGrp="1"/>
+          </p:cNvSpPr>
+          <p:nvPr>
+            <p:ph type="body" sz="quarter" idx="10"/>
+          </p:nvPr>
+        </p:nvSpPr>
+        <p:spPr/>
+        <p:txBody>
+          <a:bodyPr/>
+          <a:lstStyle/>
+          <a:p>
+            <a:endParaRPr lang="de-AT"/>
+          </a:p>
+        </p:txBody>
+      </p:sp>
+    </p:spTree>
+    <p:extLst>
+      <p:ext uri="{BB962C8B-B14F-4D97-AF65-F5344CB8AC3E}">
+        <p14:creationId xmlns:p14="http://schemas.microsoft.com/office/powerpoint/2010/main" val="4245075587"/>
+      </p:ext>
+    </p:extLst>
+  </p:cSld>
+  <p:clrMapOvr>
+    <a:masterClrMapping/>
+  </p:clrMapOvr>
+</p:sld>
+</file>
+
+<file path=ppt/slides/slide21.xml><?xml version="1.0" encoding="utf-8"?>
+<p:sld xmlns:a="http://schemas.openxmlformats.org/drawingml/2006/main" xmlns:r="http://schemas.openxmlformats.org/officeDocument/2006/relationships" xmlns:p="http://schemas.openxmlformats.org/presentationml/2006/main">
+  <p:cSld>
+    <p:spTree>
+      <p:nvGrpSpPr>
+        <p:cNvPr id="1" name=""/>
+        <p:cNvGrpSpPr/>
+        <p:nvPr/>
+      </p:nvGrpSpPr>
+      <p:grpSpPr>
+        <a:xfrm>
+          <a:off x="0" y="0"/>
+          <a:ext cx="0" cy="0"/>
+          <a:chOff x="0" y="0"/>
+          <a:chExt cx="0" cy="0"/>
+        </a:xfrm>
+      </p:grpSpPr>
+      <p:sp>
+        <p:nvSpPr>
+          <p:cNvPr id="2" name="Titel 1">
+            <a:extLst>
+              <a:ext uri="{FF2B5EF4-FFF2-40B4-BE49-F238E27FC236}">
+                <a16:creationId xmlns:a16="http://schemas.microsoft.com/office/drawing/2014/main" id="{C75F0E0C-60A1-8C90-134F-C54878BA41AF}"/>
+              </a:ext>
+            </a:extLst>
+          </p:cNvPr>
+          <p:cNvSpPr>
+            <a:spLocks noGrp="1"/>
+          </p:cNvSpPr>
+          <p:nvPr>
+            <p:ph type="title"/>
+          </p:nvPr>
+        </p:nvSpPr>
+        <p:spPr/>
+        <p:txBody>
+          <a:bodyPr/>
+          <a:lstStyle/>
+          <a:p>
+            <a:endParaRPr lang="de-AT"/>
+          </a:p>
+        </p:txBody>
+      </p:sp>
+      <p:sp>
+        <p:nvSpPr>
+          <p:cNvPr id="3" name="Textplatzhalter 2">
+            <a:extLst>
+              <a:ext uri="{FF2B5EF4-FFF2-40B4-BE49-F238E27FC236}">
+                <a16:creationId xmlns:a16="http://schemas.microsoft.com/office/drawing/2014/main" id="{D8FE1633-E201-DEEC-9EDE-9349B17A9235}"/>
+              </a:ext>
+            </a:extLst>
+          </p:cNvPr>
+          <p:cNvSpPr>
+            <a:spLocks noGrp="1"/>
+          </p:cNvSpPr>
+          <p:nvPr>
+            <p:ph type="body" sz="quarter" idx="10"/>
+          </p:nvPr>
+        </p:nvSpPr>
+        <p:spPr/>
+        <p:txBody>
+          <a:bodyPr/>
+          <a:lstStyle/>
+          <a:p>
+            <a:endParaRPr lang="de-AT"/>
+          </a:p>
+        </p:txBody>
+      </p:sp>
+    </p:spTree>
+    <p:extLst>
+      <p:ext uri="{BB962C8B-B14F-4D97-AF65-F5344CB8AC3E}">
+        <p14:creationId xmlns:p14="http://schemas.microsoft.com/office/powerpoint/2010/main" val="3363162016"/>
       </p:ext>
     </p:extLst>
   </p:cSld>
